--- a/presentacion/Presentacion.pptx
+++ b/presentacion/Presentacion.pptx
@@ -1541,7 +1541,7 @@
           </a:prstGeom>
           <a:extLst>
             <a:ext uri="{C572A759-6A51-4108-AA02-DFA0A04FC94B}">
-              <ma14:wrappingTextBoxFlag xmlns:ma14="http://schemas.microsoft.com/office/mac/drawingml/2011/main" xmlns="" val="0"/>
+              <ma14:wrappingTextBoxFlag xmlns="" xmlns:ma14="http://schemas.microsoft.com/office/mac/drawingml/2011/main" val="0"/>
             </a:ext>
           </a:extLst>
         </p:spPr>
@@ -1619,7 +1619,7 @@
           </a:prstGeom>
           <a:extLst>
             <a:ext uri="{C572A759-6A51-4108-AA02-DFA0A04FC94B}">
-              <ma14:wrappingTextBoxFlag xmlns:ma14="http://schemas.microsoft.com/office/mac/drawingml/2011/main" xmlns="" val="0"/>
+              <ma14:wrappingTextBoxFlag xmlns="" xmlns:ma14="http://schemas.microsoft.com/office/mac/drawingml/2011/main" val="0"/>
             </a:ext>
           </a:extLst>
         </p:spPr>
@@ -2118,7 +2118,7 @@
           </a:prstGeom>
           <a:extLst>
             <a:ext uri="{C572A759-6A51-4108-AA02-DFA0A04FC94B}">
-              <ma14:wrappingTextBoxFlag xmlns:ma14="http://schemas.microsoft.com/office/mac/drawingml/2011/main" xmlns="" val="0"/>
+              <ma14:wrappingTextBoxFlag xmlns="" xmlns:ma14="http://schemas.microsoft.com/office/mac/drawingml/2011/main" val="0"/>
             </a:ext>
           </a:extLst>
         </p:spPr>
@@ -3412,7 +3412,7 @@
           </a:prstGeom>
           <a:extLst>
             <a:ext uri="{C572A759-6A51-4108-AA02-DFA0A04FC94B}">
-              <ma14:wrappingTextBoxFlag xmlns:ma14="http://schemas.microsoft.com/office/mac/drawingml/2011/main" xmlns="" val="0"/>
+              <ma14:wrappingTextBoxFlag xmlns="" xmlns:ma14="http://schemas.microsoft.com/office/mac/drawingml/2011/main" val="0"/>
             </a:ext>
           </a:extLst>
         </p:spPr>
@@ -3603,7 +3603,55 @@
                   <a:srgbClr val="667587"/>
                 </a:solidFill>
               </a:rPr>
-              <a:t>La muestra no muestra una brecha práctica por tamaño de empresa, categoría de IA ni entre 2023 y 2024.</a:t>
+              <a:t>La muestra no </a:t>
+            </a:r>
+            <a:r>
+              <a:rPr lang="en-US" sz="1400" dirty="0" err="1">
+                <a:solidFill>
+                  <a:srgbClr val="667587"/>
+                </a:solidFill>
+              </a:rPr>
+              <a:t>demuestra</a:t>
+            </a:r>
+            <a:r>
+              <a:rPr lang="en-US" sz="1400" dirty="0">
+                <a:solidFill>
+                  <a:srgbClr val="667587"/>
+                </a:solidFill>
+              </a:rPr>
+              <a:t> una brecha importante práctica por tamaño de </a:t>
+            </a:r>
+            <a:r>
+              <a:rPr lang="en-US" sz="1400" dirty="0" err="1">
+                <a:solidFill>
+                  <a:srgbClr val="667587"/>
+                </a:solidFill>
+              </a:rPr>
+              <a:t>empresa</a:t>
+            </a:r>
+            <a:r>
+              <a:rPr lang="en-US" sz="1400" dirty="0">
+                <a:solidFill>
+                  <a:srgbClr val="667587"/>
+                </a:solidFill>
+              </a:rPr>
+              <a:t> </a:t>
+            </a:r>
+            <a:r>
+              <a:rPr lang="en-US" sz="1400" dirty="0" err="1">
+                <a:solidFill>
+                  <a:srgbClr val="667587"/>
+                </a:solidFill>
+              </a:rPr>
+              <a:t>ni</a:t>
+            </a:r>
+            <a:r>
+              <a:rPr lang="en-US" sz="1400" dirty="0">
+                <a:solidFill>
+                  <a:srgbClr val="667587"/>
+                </a:solidFill>
+              </a:rPr>
+              <a:t> categoría de IA entre 2023 y 2024.</a:t>
             </a:r>
             <a:endParaRPr lang="en-US" sz="1400" dirty="0"/>
           </a:p>
@@ -4516,7 +4564,7 @@
           </a:prstGeom>
           <a:extLst>
             <a:ext uri="{C572A759-6A51-4108-AA02-DFA0A04FC94B}">
-              <ma14:wrappingTextBoxFlag xmlns="" xmlns:ma14="http://schemas.microsoft.com/office/mac/drawingml/2011/main" val="0"/>
+              <ma14:wrappingTextBoxFlag xmlns:ma14="http://schemas.microsoft.com/office/mac/drawingml/2011/main" xmlns="" val="0"/>
             </a:ext>
           </a:extLst>
         </p:spPr>
@@ -4618,7 +4666,7 @@
         </p:nvSpPr>
         <p:spPr>
           <a:xfrm>
-            <a:off x="566928" y="585216"/>
+            <a:off x="566928" y="795528"/>
             <a:ext cx="10972800" cy="475488"/>
           </a:xfrm>
           <a:prstGeom prst="rect">
@@ -4674,14 +4722,6 @@
             <a:pPr marL="0" indent="0">
               <a:buNone/>
             </a:pPr>
-            <a:r>
-              <a:rPr lang="en-US" sz="1150" dirty="0">
-                <a:solidFill>
-                  <a:srgbClr val="667587"/>
-                </a:solidFill>
-              </a:rPr>
-              <a:t>Enfoque orientado a preguntas de negocio, no a una colección de gráficos.</a:t>
-            </a:r>
             <a:endParaRPr lang="en-US" sz="1150" dirty="0"/>
           </a:p>
         </p:txBody>
@@ -5435,7 +5475,7 @@
           </a:prstGeom>
           <a:extLst>
             <a:ext uri="{C572A759-6A51-4108-AA02-DFA0A04FC94B}">
-              <ma14:wrappingTextBoxFlag xmlns:ma14="http://schemas.microsoft.com/office/mac/drawingml/2011/main" xmlns="" val="0"/>
+              <ma14:wrappingTextBoxFlag xmlns="" xmlns:ma14="http://schemas.microsoft.com/office/mac/drawingml/2011/main" val="0"/>
             </a:ext>
           </a:extLst>
         </p:spPr>
@@ -7356,7 +7396,7 @@
           </a:prstGeom>
           <a:extLst>
             <a:ext uri="{C572A759-6A51-4108-AA02-DFA0A04FC94B}">
-              <ma14:wrappingTextBoxFlag xmlns:ma14="http://schemas.microsoft.com/office/mac/drawingml/2011/main" xmlns="" val="0"/>
+              <ma14:wrappingTextBoxFlag xmlns="" xmlns:ma14="http://schemas.microsoft.com/office/mac/drawingml/2011/main" val="0"/>
             </a:ext>
           </a:extLst>
         </p:spPr>
@@ -8707,7 +8747,7 @@
         </p:nvSpPr>
         <p:spPr>
           <a:xfrm>
-            <a:off x="896112" y="4846320"/>
+            <a:off x="877824" y="4956048"/>
             <a:ext cx="1920240" cy="219456"/>
           </a:xfrm>
           <a:prstGeom prst="rect">
@@ -8720,18 +8760,18 @@
           <a:bodyPr wrap="square" lIns="0" tIns="0" rIns="0" bIns="0" rtlCol="0" anchor="ctr"/>
           <a:lstStyle/>
           <a:p>
-            <a:pPr marL="0" indent="0">
-              <a:buNone/>
-            </a:pPr>
-            <a:r>
-              <a:rPr lang="en-US" sz="1100" b="1" dirty="0">
+            <a:pPr marL="0" indent="0" algn="ctr">
+              <a:buNone/>
+            </a:pPr>
+            <a:r>
+              <a:rPr lang="en-US" sz="1400" b="1" dirty="0">
                 <a:solidFill>
                   <a:srgbClr val="123B5D"/>
                 </a:solidFill>
               </a:rPr>
-              <a:t>Principio de interpretación</a:t>
-            </a:r>
-            <a:endParaRPr lang="en-US" sz="1100" dirty="0"/>
+              <a:t>interpretación</a:t>
+            </a:r>
+            <a:endParaRPr lang="en-US" sz="1400" dirty="0"/>
           </a:p>
         </p:txBody>
       </p:sp>
@@ -8743,7 +8783,7 @@
         </p:nvSpPr>
         <p:spPr>
           <a:xfrm>
-            <a:off x="2798064" y="4800600"/>
+            <a:off x="2770632" y="4910328"/>
             <a:ext cx="8229600" cy="393192"/>
           </a:xfrm>
           <a:prstGeom prst="rect">
@@ -8793,7 +8833,7 @@
           </a:prstGeom>
           <a:extLst>
             <a:ext uri="{C572A759-6A51-4108-AA02-DFA0A04FC94B}">
-              <ma14:wrappingTextBoxFlag xmlns:ma14="http://schemas.microsoft.com/office/mac/drawingml/2011/main" xmlns="" val="0"/>
+              <ma14:wrappingTextBoxFlag xmlns="" xmlns:ma14="http://schemas.microsoft.com/office/mac/drawingml/2011/main" val="0"/>
             </a:ext>
           </a:extLst>
         </p:spPr>
@@ -9575,7 +9615,7 @@
         </p:nvSpPr>
         <p:spPr>
           <a:xfrm>
-            <a:off x="731520" y="4919472"/>
+            <a:off x="904001" y="4844167"/>
             <a:ext cx="777240" cy="201168"/>
           </a:xfrm>
           <a:prstGeom prst="rect">
@@ -9792,7 +9832,7 @@
         </p:nvSpPr>
         <p:spPr>
           <a:xfrm>
-            <a:off x="4672584" y="4919472"/>
+            <a:off x="4754880" y="4901184"/>
             <a:ext cx="777240" cy="201168"/>
           </a:xfrm>
           <a:prstGeom prst="rect">
@@ -9828,7 +9868,7 @@
         </p:nvSpPr>
         <p:spPr>
           <a:xfrm>
-            <a:off x="7077456" y="4864608"/>
+            <a:off x="7306056" y="4914900"/>
             <a:ext cx="777240" cy="201168"/>
           </a:xfrm>
           <a:prstGeom prst="rect">
@@ -10089,7 +10129,7 @@
           </a:prstGeom>
           <a:extLst>
             <a:ext uri="{C572A759-6A51-4108-AA02-DFA0A04FC94B}">
-              <ma14:wrappingTextBoxFlag xmlns:ma14="http://schemas.microsoft.com/office/mac/drawingml/2011/main" xmlns="" val="0"/>
+              <ma14:wrappingTextBoxFlag xmlns="" xmlns:ma14="http://schemas.microsoft.com/office/mac/drawingml/2011/main" val="0"/>
             </a:ext>
           </a:extLst>
         </p:spPr>
@@ -11145,7 +11185,7 @@
           </a:prstGeom>
           <a:extLst>
             <a:ext uri="{C572A759-6A51-4108-AA02-DFA0A04FC94B}">
-              <ma14:wrappingTextBoxFlag xmlns:ma14="http://schemas.microsoft.com/office/mac/drawingml/2011/main" xmlns="" val="0"/>
+              <ma14:wrappingTextBoxFlag xmlns="" xmlns:ma14="http://schemas.microsoft.com/office/mac/drawingml/2011/main" val="0"/>
             </a:ext>
           </a:extLst>
         </p:spPr>
@@ -11562,7 +11602,7 @@
         </p:nvSpPr>
         <p:spPr>
           <a:xfrm>
-            <a:off x="2029968" y="3721608"/>
+            <a:off x="2474528" y="3604349"/>
             <a:ext cx="1143000" cy="182880"/>
           </a:xfrm>
           <a:prstGeom prst="rect">
@@ -11598,7 +11638,7 @@
         </p:nvSpPr>
         <p:spPr>
           <a:xfrm>
-            <a:off x="3410712" y="3721608"/>
+            <a:off x="4146804" y="3631782"/>
             <a:ext cx="1143000" cy="182880"/>
           </a:xfrm>
           <a:prstGeom prst="rect">
@@ -11743,7 +11783,7 @@
         </p:nvSpPr>
         <p:spPr>
           <a:xfrm>
-            <a:off x="2011680" y="4672584"/>
+            <a:off x="2487527" y="4581144"/>
             <a:ext cx="1143000" cy="182880"/>
           </a:xfrm>
           <a:prstGeom prst="rect">
@@ -11779,7 +11819,7 @@
         </p:nvSpPr>
         <p:spPr>
           <a:xfrm>
-            <a:off x="3383280" y="4672584"/>
+            <a:off x="4062966" y="4572000"/>
             <a:ext cx="1234440" cy="182880"/>
           </a:xfrm>
           <a:prstGeom prst="rect">
@@ -12429,7 +12469,7 @@
           </a:prstGeom>
           <a:extLst>
             <a:ext uri="{C572A759-6A51-4108-AA02-DFA0A04FC94B}">
-              <ma14:wrappingTextBoxFlag xmlns:ma14="http://schemas.microsoft.com/office/mac/drawingml/2011/main" xmlns="" val="0"/>
+              <ma14:wrappingTextBoxFlag xmlns="" xmlns:ma14="http://schemas.microsoft.com/office/mac/drawingml/2011/main" val="0"/>
             </a:ext>
           </a:extLst>
         </p:spPr>
@@ -13419,7 +13459,7 @@
           </a:prstGeom>
           <a:extLst>
             <a:ext uri="{C572A759-6A51-4108-AA02-DFA0A04FC94B}">
-              <ma14:wrappingTextBoxFlag xmlns:ma14="http://schemas.microsoft.com/office/mac/drawingml/2011/main" xmlns="" val="0"/>
+              <ma14:wrappingTextBoxFlag xmlns="" xmlns:ma14="http://schemas.microsoft.com/office/mac/drawingml/2011/main" val="0"/>
             </a:ext>
           </a:extLst>
         </p:spPr>
